--- a/assets/images/funds/total.pptx
+++ b/assets/images/funds/total.pptx
@@ -104,6 +104,11 @@
       </a:defRPr>
     </a:lvl9pPr>
   </p:defaultTextStyle>
+  <p:extLst>
+    <p:ext uri="{EFAFB233-063F-42B5-8137-9DF3F51BA10A}">
+      <p15:sldGuideLst xmlns:p15="http://schemas.microsoft.com/office/powerpoint/2012/main"/>
+    </p:ext>
+  </p:extLst>
 </p:presentation>
 </file>
 
@@ -254,7 +259,7 @@
           <a:p>
             <a:fld id="{69841353-8F51-48F1-AFC3-B4F4C2686E57}" type="datetimeFigureOut">
               <a:rPr lang="en-US" smtClean="0"/>
-              <a:t>12/23/2025</a:t>
+              <a:t>12/25/2025</a:t>
             </a:fld>
             <a:endParaRPr lang="en-US"/>
           </a:p>
@@ -452,7 +457,7 @@
           <a:p>
             <a:fld id="{69841353-8F51-48F1-AFC3-B4F4C2686E57}" type="datetimeFigureOut">
               <a:rPr lang="en-US" smtClean="0"/>
-              <a:t>12/23/2025</a:t>
+              <a:t>12/25/2025</a:t>
             </a:fld>
             <a:endParaRPr lang="en-US"/>
           </a:p>
@@ -660,7 +665,7 @@
           <a:p>
             <a:fld id="{69841353-8F51-48F1-AFC3-B4F4C2686E57}" type="datetimeFigureOut">
               <a:rPr lang="en-US" smtClean="0"/>
-              <a:t>12/23/2025</a:t>
+              <a:t>12/25/2025</a:t>
             </a:fld>
             <a:endParaRPr lang="en-US"/>
           </a:p>
@@ -858,7 +863,7 @@
           <a:p>
             <a:fld id="{69841353-8F51-48F1-AFC3-B4F4C2686E57}" type="datetimeFigureOut">
               <a:rPr lang="en-US" smtClean="0"/>
-              <a:t>12/23/2025</a:t>
+              <a:t>12/25/2025</a:t>
             </a:fld>
             <a:endParaRPr lang="en-US"/>
           </a:p>
@@ -1133,7 +1138,7 @@
           <a:p>
             <a:fld id="{69841353-8F51-48F1-AFC3-B4F4C2686E57}" type="datetimeFigureOut">
               <a:rPr lang="en-US" smtClean="0"/>
-              <a:t>12/23/2025</a:t>
+              <a:t>12/25/2025</a:t>
             </a:fld>
             <a:endParaRPr lang="en-US"/>
           </a:p>
@@ -1398,7 +1403,7 @@
           <a:p>
             <a:fld id="{69841353-8F51-48F1-AFC3-B4F4C2686E57}" type="datetimeFigureOut">
               <a:rPr lang="en-US" smtClean="0"/>
-              <a:t>12/23/2025</a:t>
+              <a:t>12/25/2025</a:t>
             </a:fld>
             <a:endParaRPr lang="en-US"/>
           </a:p>
@@ -1810,7 +1815,7 @@
           <a:p>
             <a:fld id="{69841353-8F51-48F1-AFC3-B4F4C2686E57}" type="datetimeFigureOut">
               <a:rPr lang="en-US" smtClean="0"/>
-              <a:t>12/23/2025</a:t>
+              <a:t>12/25/2025</a:t>
             </a:fld>
             <a:endParaRPr lang="en-US"/>
           </a:p>
@@ -1951,7 +1956,7 @@
           <a:p>
             <a:fld id="{69841353-8F51-48F1-AFC3-B4F4C2686E57}" type="datetimeFigureOut">
               <a:rPr lang="en-US" smtClean="0"/>
-              <a:t>12/23/2025</a:t>
+              <a:t>12/25/2025</a:t>
             </a:fld>
             <a:endParaRPr lang="en-US"/>
           </a:p>
@@ -2064,7 +2069,7 @@
           <a:p>
             <a:fld id="{69841353-8F51-48F1-AFC3-B4F4C2686E57}" type="datetimeFigureOut">
               <a:rPr lang="en-US" smtClean="0"/>
-              <a:t>12/23/2025</a:t>
+              <a:t>12/25/2025</a:t>
             </a:fld>
             <a:endParaRPr lang="en-US"/>
           </a:p>
@@ -2375,7 +2380,7 @@
           <a:p>
             <a:fld id="{69841353-8F51-48F1-AFC3-B4F4C2686E57}" type="datetimeFigureOut">
               <a:rPr lang="en-US" smtClean="0"/>
-              <a:t>12/23/2025</a:t>
+              <a:t>12/25/2025</a:t>
             </a:fld>
             <a:endParaRPr lang="en-US"/>
           </a:p>
@@ -2663,7 +2668,7 @@
           <a:p>
             <a:fld id="{69841353-8F51-48F1-AFC3-B4F4C2686E57}" type="datetimeFigureOut">
               <a:rPr lang="en-US" smtClean="0"/>
-              <a:t>12/23/2025</a:t>
+              <a:t>12/25/2025</a:t>
             </a:fld>
             <a:endParaRPr lang="en-US"/>
           </a:p>
@@ -2904,7 +2909,7 @@
           <a:p>
             <a:fld id="{69841353-8F51-48F1-AFC3-B4F4C2686E57}" type="datetimeFigureOut">
               <a:rPr lang="en-US" smtClean="0"/>
-              <a:t>12/23/2025</a:t>
+              <a:t>12/25/2025</a:t>
             </a:fld>
             <a:endParaRPr lang="en-US"/>
           </a:p>
@@ -3385,7 +3390,7 @@
         </p:blipFill>
         <p:spPr>
           <a:xfrm>
-            <a:off x="1207943" y="880355"/>
+            <a:off x="919123" y="880355"/>
             <a:ext cx="4964374" cy="914400"/>
           </a:xfrm>
           <a:prstGeom prst="rect">
@@ -3457,7 +3462,7 @@
         </p:blipFill>
         <p:spPr>
           <a:xfrm>
-            <a:off x="818836" y="2351662"/>
+            <a:off x="818836" y="2260222"/>
             <a:ext cx="1371600" cy="1371600"/>
           </a:xfrm>
           <a:prstGeom prst="rect">
@@ -3529,8 +3534,8 @@
         </p:blipFill>
         <p:spPr>
           <a:xfrm>
-            <a:off x="6459653" y="880355"/>
-            <a:ext cx="4405410" cy="914400"/>
+            <a:off x="6308505" y="788915"/>
+            <a:ext cx="5286492" cy="1097280"/>
           </a:xfrm>
           <a:prstGeom prst="rect">
             <a:avLst/>
@@ -3559,8 +3564,8 @@
         </p:blipFill>
         <p:spPr>
           <a:xfrm>
-            <a:off x="10181527" y="2351662"/>
-            <a:ext cx="1367073" cy="1371600"/>
+            <a:off x="10181527" y="2168782"/>
+            <a:ext cx="1549349" cy="1554480"/>
           </a:xfrm>
           <a:prstGeom prst="rect">
             <a:avLst/>

--- a/assets/images/funds/total.pptx
+++ b/assets/images/funds/total.pptx
@@ -2,18 +2,18 @@
 <file path=ppt/presentation.xml><?xml version="1.0" encoding="utf-8"?>
 <p:presentation xmlns:a="http://schemas.openxmlformats.org/drawingml/2006/main" xmlns:r="http://schemas.openxmlformats.org/officeDocument/2006/relationships" xmlns:p="http://schemas.openxmlformats.org/presentationml/2006/main" saveSubsetFonts="1">
   <p:sldMasterIdLst>
-    <p:sldMasterId id="2147483648" r:id="rId1"/>
+    <p:sldMasterId id="2147483660" r:id="rId1"/>
   </p:sldMasterIdLst>
   <p:sldIdLst>
     <p:sldId id="257" r:id="rId2"/>
   </p:sldIdLst>
-  <p:sldSz cx="12192000" cy="6858000"/>
+  <p:sldSz cx="13716000" cy="6858000"/>
   <p:notesSz cx="6858000" cy="9144000"/>
   <p:defaultTextStyle>
     <a:defPPr>
       <a:defRPr lang="en-US"/>
     </a:defPPr>
-    <a:lvl1pPr marL="0" algn="l" defTabSz="914400" rtl="0" eaLnBrk="1" latinLnBrk="0" hangingPunct="1">
+    <a:lvl1pPr marL="0" algn="l" defTabSz="457200" rtl="0" eaLnBrk="1" latinLnBrk="0" hangingPunct="1">
       <a:defRPr sz="1800" kern="1200">
         <a:solidFill>
           <a:schemeClr val="tx1"/>
@@ -23,7 +23,7 @@
         <a:cs typeface="+mn-cs"/>
       </a:defRPr>
     </a:lvl1pPr>
-    <a:lvl2pPr marL="457200" algn="l" defTabSz="914400" rtl="0" eaLnBrk="1" latinLnBrk="0" hangingPunct="1">
+    <a:lvl2pPr marL="457200" algn="l" defTabSz="457200" rtl="0" eaLnBrk="1" latinLnBrk="0" hangingPunct="1">
       <a:defRPr sz="1800" kern="1200">
         <a:solidFill>
           <a:schemeClr val="tx1"/>
@@ -33,7 +33,7 @@
         <a:cs typeface="+mn-cs"/>
       </a:defRPr>
     </a:lvl2pPr>
-    <a:lvl3pPr marL="914400" algn="l" defTabSz="914400" rtl="0" eaLnBrk="1" latinLnBrk="0" hangingPunct="1">
+    <a:lvl3pPr marL="914400" algn="l" defTabSz="457200" rtl="0" eaLnBrk="1" latinLnBrk="0" hangingPunct="1">
       <a:defRPr sz="1800" kern="1200">
         <a:solidFill>
           <a:schemeClr val="tx1"/>
@@ -43,7 +43,7 @@
         <a:cs typeface="+mn-cs"/>
       </a:defRPr>
     </a:lvl3pPr>
-    <a:lvl4pPr marL="1371600" algn="l" defTabSz="914400" rtl="0" eaLnBrk="1" latinLnBrk="0" hangingPunct="1">
+    <a:lvl4pPr marL="1371600" algn="l" defTabSz="457200" rtl="0" eaLnBrk="1" latinLnBrk="0" hangingPunct="1">
       <a:defRPr sz="1800" kern="1200">
         <a:solidFill>
           <a:schemeClr val="tx1"/>
@@ -53,7 +53,7 @@
         <a:cs typeface="+mn-cs"/>
       </a:defRPr>
     </a:lvl4pPr>
-    <a:lvl5pPr marL="1828800" algn="l" defTabSz="914400" rtl="0" eaLnBrk="1" latinLnBrk="0" hangingPunct="1">
+    <a:lvl5pPr marL="1828800" algn="l" defTabSz="457200" rtl="0" eaLnBrk="1" latinLnBrk="0" hangingPunct="1">
       <a:defRPr sz="1800" kern="1200">
         <a:solidFill>
           <a:schemeClr val="tx1"/>
@@ -63,7 +63,7 @@
         <a:cs typeface="+mn-cs"/>
       </a:defRPr>
     </a:lvl5pPr>
-    <a:lvl6pPr marL="2286000" algn="l" defTabSz="914400" rtl="0" eaLnBrk="1" latinLnBrk="0" hangingPunct="1">
+    <a:lvl6pPr marL="2286000" algn="l" defTabSz="457200" rtl="0" eaLnBrk="1" latinLnBrk="0" hangingPunct="1">
       <a:defRPr sz="1800" kern="1200">
         <a:solidFill>
           <a:schemeClr val="tx1"/>
@@ -73,7 +73,7 @@
         <a:cs typeface="+mn-cs"/>
       </a:defRPr>
     </a:lvl6pPr>
-    <a:lvl7pPr marL="2743200" algn="l" defTabSz="914400" rtl="0" eaLnBrk="1" latinLnBrk="0" hangingPunct="1">
+    <a:lvl7pPr marL="2743200" algn="l" defTabSz="457200" rtl="0" eaLnBrk="1" latinLnBrk="0" hangingPunct="1">
       <a:defRPr sz="1800" kern="1200">
         <a:solidFill>
           <a:schemeClr val="tx1"/>
@@ -83,7 +83,7 @@
         <a:cs typeface="+mn-cs"/>
       </a:defRPr>
     </a:lvl7pPr>
-    <a:lvl8pPr marL="3200400" algn="l" defTabSz="914400" rtl="0" eaLnBrk="1" latinLnBrk="0" hangingPunct="1">
+    <a:lvl8pPr marL="3200400" algn="l" defTabSz="457200" rtl="0" eaLnBrk="1" latinLnBrk="0" hangingPunct="1">
       <a:defRPr sz="1800" kern="1200">
         <a:solidFill>
           <a:schemeClr val="tx1"/>
@@ -93,7 +93,7 @@
         <a:cs typeface="+mn-cs"/>
       </a:defRPr>
     </a:lvl8pPr>
-    <a:lvl9pPr marL="3657600" algn="l" defTabSz="914400" rtl="0" eaLnBrk="1" latinLnBrk="0" hangingPunct="1">
+    <a:lvl9pPr marL="3657600" algn="l" defTabSz="457200" rtl="0" eaLnBrk="1" latinLnBrk="0" hangingPunct="1">
       <a:defRPr sz="1800" kern="1200">
         <a:solidFill>
           <a:schemeClr val="tx1"/>
@@ -131,13 +131,7 @@
       </p:grpSpPr>
       <p:sp>
         <p:nvSpPr>
-          <p:cNvPr id="2" name="Title 1">
-            <a:extLst>
-              <a:ext uri="{FF2B5EF4-FFF2-40B4-BE49-F238E27FC236}">
-                <a16:creationId xmlns:a16="http://schemas.microsoft.com/office/drawing/2014/main" id="{4046C501-3BF3-42E1-1194-B602FCCA03DA}"/>
-              </a:ext>
-            </a:extLst>
-          </p:cNvPr>
+          <p:cNvPr id="2" name="Title 1"/>
           <p:cNvSpPr>
             <a:spLocks noGrp="1"/>
           </p:cNvSpPr>
@@ -147,8 +141,8 @@
         </p:nvSpPr>
         <p:spPr>
           <a:xfrm>
-            <a:off x="1524000" y="1122363"/>
-            <a:ext cx="9144000" cy="2387600"/>
+            <a:off x="1714500" y="1122363"/>
+            <a:ext cx="10287000" cy="2387600"/>
           </a:xfrm>
         </p:spPr>
         <p:txBody>
@@ -163,18 +157,13 @@
               <a:rPr lang="en-US"/>
               <a:t>Click to edit Master title style</a:t>
             </a:r>
-          </a:p>
-        </p:txBody>
-      </p:sp>
-      <p:sp>
-        <p:nvSpPr>
-          <p:cNvPr id="3" name="Subtitle 2">
-            <a:extLst>
-              <a:ext uri="{FF2B5EF4-FFF2-40B4-BE49-F238E27FC236}">
-                <a16:creationId xmlns:a16="http://schemas.microsoft.com/office/drawing/2014/main" id="{A0DE6398-EF25-D891-FF3A-5C39D012044D}"/>
-              </a:ext>
-            </a:extLst>
-          </p:cNvPr>
+            <a:endParaRPr lang="en-US" dirty="0"/>
+          </a:p>
+        </p:txBody>
+      </p:sp>
+      <p:sp>
+        <p:nvSpPr>
+          <p:cNvPr id="3" name="Subtitle 2"/>
           <p:cNvSpPr>
             <a:spLocks noGrp="1"/>
           </p:cNvSpPr>
@@ -184,8 +173,8 @@
         </p:nvSpPr>
         <p:spPr>
           <a:xfrm>
-            <a:off x="1524000" y="3602038"/>
-            <a:ext cx="9144000" cy="1655762"/>
+            <a:off x="1714500" y="3602038"/>
+            <a:ext cx="10287000" cy="1655762"/>
           </a:xfrm>
         </p:spPr>
         <p:txBody>
@@ -233,18 +222,13 @@
               <a:rPr lang="en-US"/>
               <a:t>Click to edit Master subtitle style</a:t>
             </a:r>
-          </a:p>
-        </p:txBody>
-      </p:sp>
-      <p:sp>
-        <p:nvSpPr>
-          <p:cNvPr id="4" name="Date Placeholder 3">
-            <a:extLst>
-              <a:ext uri="{FF2B5EF4-FFF2-40B4-BE49-F238E27FC236}">
-                <a16:creationId xmlns:a16="http://schemas.microsoft.com/office/drawing/2014/main" id="{AFA008FB-6B45-A331-17C1-375BBAFAC5C9}"/>
-              </a:ext>
-            </a:extLst>
-          </p:cNvPr>
+            <a:endParaRPr lang="en-US" dirty="0"/>
+          </a:p>
+        </p:txBody>
+      </p:sp>
+      <p:sp>
+        <p:nvSpPr>
+          <p:cNvPr id="4" name="Date Placeholder 3"/>
           <p:cNvSpPr>
             <a:spLocks noGrp="1"/>
           </p:cNvSpPr>
@@ -259,7 +243,7 @@
           <a:p>
             <a:fld id="{69841353-8F51-48F1-AFC3-B4F4C2686E57}" type="datetimeFigureOut">
               <a:rPr lang="en-US" smtClean="0"/>
-              <a:t>12/25/2025</a:t>
+              <a:t>3/7/2026</a:t>
             </a:fld>
             <a:endParaRPr lang="en-US"/>
           </a:p>
@@ -267,13 +251,7 @@
       </p:sp>
       <p:sp>
         <p:nvSpPr>
-          <p:cNvPr id="5" name="Footer Placeholder 4">
-            <a:extLst>
-              <a:ext uri="{FF2B5EF4-FFF2-40B4-BE49-F238E27FC236}">
-                <a16:creationId xmlns:a16="http://schemas.microsoft.com/office/drawing/2014/main" id="{D9048E51-1939-564E-F877-7B056D3DF45B}"/>
-              </a:ext>
-            </a:extLst>
-          </p:cNvPr>
+          <p:cNvPr id="5" name="Footer Placeholder 4"/>
           <p:cNvSpPr>
             <a:spLocks noGrp="1"/>
           </p:cNvSpPr>
@@ -292,13 +270,7 @@
       </p:sp>
       <p:sp>
         <p:nvSpPr>
-          <p:cNvPr id="6" name="Slide Number Placeholder 5">
-            <a:extLst>
-              <a:ext uri="{FF2B5EF4-FFF2-40B4-BE49-F238E27FC236}">
-                <a16:creationId xmlns:a16="http://schemas.microsoft.com/office/drawing/2014/main" id="{F4D6706B-A81C-0297-9488-2369EE425A23}"/>
-              </a:ext>
-            </a:extLst>
-          </p:cNvPr>
+          <p:cNvPr id="6" name="Slide Number Placeholder 5"/>
           <p:cNvSpPr>
             <a:spLocks noGrp="1"/>
           </p:cNvSpPr>
@@ -322,7 +294,7 @@
     </p:spTree>
     <p:extLst>
       <p:ext uri="{BB962C8B-B14F-4D97-AF65-F5344CB8AC3E}">
-        <p14:creationId xmlns:p14="http://schemas.microsoft.com/office/powerpoint/2010/main" val="4079635970"/>
+        <p14:creationId xmlns:p14="http://schemas.microsoft.com/office/powerpoint/2010/main" val="2808014438"/>
       </p:ext>
     </p:extLst>
   </p:cSld>
@@ -351,13 +323,7 @@
       </p:grpSpPr>
       <p:sp>
         <p:nvSpPr>
-          <p:cNvPr id="2" name="Title 1">
-            <a:extLst>
-              <a:ext uri="{FF2B5EF4-FFF2-40B4-BE49-F238E27FC236}">
-                <a16:creationId xmlns:a16="http://schemas.microsoft.com/office/drawing/2014/main" id="{8191B860-3907-5EB9-F5A9-1677FFAA1D79}"/>
-              </a:ext>
-            </a:extLst>
-          </p:cNvPr>
+          <p:cNvPr id="2" name="Title 1"/>
           <p:cNvSpPr>
             <a:spLocks noGrp="1"/>
           </p:cNvSpPr>
@@ -374,18 +340,13 @@
               <a:rPr lang="en-US"/>
               <a:t>Click to edit Master title style</a:t>
             </a:r>
-          </a:p>
-        </p:txBody>
-      </p:sp>
-      <p:sp>
-        <p:nvSpPr>
-          <p:cNvPr id="3" name="Vertical Text Placeholder 2">
-            <a:extLst>
-              <a:ext uri="{FF2B5EF4-FFF2-40B4-BE49-F238E27FC236}">
-                <a16:creationId xmlns:a16="http://schemas.microsoft.com/office/drawing/2014/main" id="{2031D8DB-9953-65DC-3933-81845C1077C5}"/>
-              </a:ext>
-            </a:extLst>
-          </p:cNvPr>
+            <a:endParaRPr lang="en-US" dirty="0"/>
+          </a:p>
+        </p:txBody>
+      </p:sp>
+      <p:sp>
+        <p:nvSpPr>
+          <p:cNvPr id="3" name="Vertical Text Placeholder 2"/>
           <p:cNvSpPr>
             <a:spLocks noGrp="1"/>
           </p:cNvSpPr>
@@ -431,18 +392,13 @@
               <a:rPr lang="en-US"/>
               <a:t>Fifth level</a:t>
             </a:r>
-          </a:p>
-        </p:txBody>
-      </p:sp>
-      <p:sp>
-        <p:nvSpPr>
-          <p:cNvPr id="4" name="Date Placeholder 3">
-            <a:extLst>
-              <a:ext uri="{FF2B5EF4-FFF2-40B4-BE49-F238E27FC236}">
-                <a16:creationId xmlns:a16="http://schemas.microsoft.com/office/drawing/2014/main" id="{5044926D-3F30-D753-7611-B029C4BCD089}"/>
-              </a:ext>
-            </a:extLst>
-          </p:cNvPr>
+            <a:endParaRPr lang="en-US" dirty="0"/>
+          </a:p>
+        </p:txBody>
+      </p:sp>
+      <p:sp>
+        <p:nvSpPr>
+          <p:cNvPr id="4" name="Date Placeholder 3"/>
           <p:cNvSpPr>
             <a:spLocks noGrp="1"/>
           </p:cNvSpPr>
@@ -457,7 +413,7 @@
           <a:p>
             <a:fld id="{69841353-8F51-48F1-AFC3-B4F4C2686E57}" type="datetimeFigureOut">
               <a:rPr lang="en-US" smtClean="0"/>
-              <a:t>12/25/2025</a:t>
+              <a:t>3/7/2026</a:t>
             </a:fld>
             <a:endParaRPr lang="en-US"/>
           </a:p>
@@ -465,13 +421,7 @@
       </p:sp>
       <p:sp>
         <p:nvSpPr>
-          <p:cNvPr id="5" name="Footer Placeholder 4">
-            <a:extLst>
-              <a:ext uri="{FF2B5EF4-FFF2-40B4-BE49-F238E27FC236}">
-                <a16:creationId xmlns:a16="http://schemas.microsoft.com/office/drawing/2014/main" id="{453B3F73-DDB8-DE81-994A-8EC9EA10A3E8}"/>
-              </a:ext>
-            </a:extLst>
-          </p:cNvPr>
+          <p:cNvPr id="5" name="Footer Placeholder 4"/>
           <p:cNvSpPr>
             <a:spLocks noGrp="1"/>
           </p:cNvSpPr>
@@ -490,13 +440,7 @@
       </p:sp>
       <p:sp>
         <p:nvSpPr>
-          <p:cNvPr id="6" name="Slide Number Placeholder 5">
-            <a:extLst>
-              <a:ext uri="{FF2B5EF4-FFF2-40B4-BE49-F238E27FC236}">
-                <a16:creationId xmlns:a16="http://schemas.microsoft.com/office/drawing/2014/main" id="{A644691D-26CE-837A-DBAA-69C36CC84BFB}"/>
-              </a:ext>
-            </a:extLst>
-          </p:cNvPr>
+          <p:cNvPr id="6" name="Slide Number Placeholder 5"/>
           <p:cNvSpPr>
             <a:spLocks noGrp="1"/>
           </p:cNvSpPr>
@@ -520,7 +464,7 @@
     </p:spTree>
     <p:extLst>
       <p:ext uri="{BB962C8B-B14F-4D97-AF65-F5344CB8AC3E}">
-        <p14:creationId xmlns:p14="http://schemas.microsoft.com/office/powerpoint/2010/main" val="1323608824"/>
+        <p14:creationId xmlns:p14="http://schemas.microsoft.com/office/powerpoint/2010/main" val="553719847"/>
       </p:ext>
     </p:extLst>
   </p:cSld>
@@ -549,13 +493,7 @@
       </p:grpSpPr>
       <p:sp>
         <p:nvSpPr>
-          <p:cNvPr id="2" name="Vertical Title 1">
-            <a:extLst>
-              <a:ext uri="{FF2B5EF4-FFF2-40B4-BE49-F238E27FC236}">
-                <a16:creationId xmlns:a16="http://schemas.microsoft.com/office/drawing/2014/main" id="{FF0768D8-A164-28D6-AB7B-E31DD7485A3A}"/>
-              </a:ext>
-            </a:extLst>
-          </p:cNvPr>
+          <p:cNvPr id="2" name="Vertical Title 1"/>
           <p:cNvSpPr>
             <a:spLocks noGrp="1"/>
           </p:cNvSpPr>
@@ -565,8 +503,8 @@
         </p:nvSpPr>
         <p:spPr>
           <a:xfrm>
-            <a:off x="8724900" y="365125"/>
-            <a:ext cx="2628900" cy="5811838"/>
+            <a:off x="9815512" y="365125"/>
+            <a:ext cx="2957513" cy="5811838"/>
           </a:xfrm>
         </p:spPr>
         <p:txBody>
@@ -577,18 +515,13 @@
               <a:rPr lang="en-US"/>
               <a:t>Click to edit Master title style</a:t>
             </a:r>
-          </a:p>
-        </p:txBody>
-      </p:sp>
-      <p:sp>
-        <p:nvSpPr>
-          <p:cNvPr id="3" name="Vertical Text Placeholder 2">
-            <a:extLst>
-              <a:ext uri="{FF2B5EF4-FFF2-40B4-BE49-F238E27FC236}">
-                <a16:creationId xmlns:a16="http://schemas.microsoft.com/office/drawing/2014/main" id="{10177966-6C3C-95E8-31E6-1A9B6C3C3B25}"/>
-              </a:ext>
-            </a:extLst>
-          </p:cNvPr>
+            <a:endParaRPr lang="en-US" dirty="0"/>
+          </a:p>
+        </p:txBody>
+      </p:sp>
+      <p:sp>
+        <p:nvSpPr>
+          <p:cNvPr id="3" name="Vertical Text Placeholder 2"/>
           <p:cNvSpPr>
             <a:spLocks noGrp="1"/>
           </p:cNvSpPr>
@@ -598,8 +531,8 @@
         </p:nvSpPr>
         <p:spPr>
           <a:xfrm>
-            <a:off x="838200" y="365125"/>
-            <a:ext cx="7734300" cy="5811838"/>
+            <a:off x="942975" y="365125"/>
+            <a:ext cx="8701088" cy="5811838"/>
           </a:xfrm>
         </p:spPr>
         <p:txBody>
@@ -639,18 +572,13 @@
               <a:rPr lang="en-US"/>
               <a:t>Fifth level</a:t>
             </a:r>
-          </a:p>
-        </p:txBody>
-      </p:sp>
-      <p:sp>
-        <p:nvSpPr>
-          <p:cNvPr id="4" name="Date Placeholder 3">
-            <a:extLst>
-              <a:ext uri="{FF2B5EF4-FFF2-40B4-BE49-F238E27FC236}">
-                <a16:creationId xmlns:a16="http://schemas.microsoft.com/office/drawing/2014/main" id="{6780029B-5125-4862-C76B-2695CE126475}"/>
-              </a:ext>
-            </a:extLst>
-          </p:cNvPr>
+            <a:endParaRPr lang="en-US" dirty="0"/>
+          </a:p>
+        </p:txBody>
+      </p:sp>
+      <p:sp>
+        <p:nvSpPr>
+          <p:cNvPr id="4" name="Date Placeholder 3"/>
           <p:cNvSpPr>
             <a:spLocks noGrp="1"/>
           </p:cNvSpPr>
@@ -665,7 +593,7 @@
           <a:p>
             <a:fld id="{69841353-8F51-48F1-AFC3-B4F4C2686E57}" type="datetimeFigureOut">
               <a:rPr lang="en-US" smtClean="0"/>
-              <a:t>12/25/2025</a:t>
+              <a:t>3/7/2026</a:t>
             </a:fld>
             <a:endParaRPr lang="en-US"/>
           </a:p>
@@ -673,13 +601,7 @@
       </p:sp>
       <p:sp>
         <p:nvSpPr>
-          <p:cNvPr id="5" name="Footer Placeholder 4">
-            <a:extLst>
-              <a:ext uri="{FF2B5EF4-FFF2-40B4-BE49-F238E27FC236}">
-                <a16:creationId xmlns:a16="http://schemas.microsoft.com/office/drawing/2014/main" id="{C22E298D-84B8-0035-05C7-4152FD9CEFE5}"/>
-              </a:ext>
-            </a:extLst>
-          </p:cNvPr>
+          <p:cNvPr id="5" name="Footer Placeholder 4"/>
           <p:cNvSpPr>
             <a:spLocks noGrp="1"/>
           </p:cNvSpPr>
@@ -698,13 +620,7 @@
       </p:sp>
       <p:sp>
         <p:nvSpPr>
-          <p:cNvPr id="6" name="Slide Number Placeholder 5">
-            <a:extLst>
-              <a:ext uri="{FF2B5EF4-FFF2-40B4-BE49-F238E27FC236}">
-                <a16:creationId xmlns:a16="http://schemas.microsoft.com/office/drawing/2014/main" id="{85A4076E-F844-1CD6-14DC-FF9B0689BCC5}"/>
-              </a:ext>
-            </a:extLst>
-          </p:cNvPr>
+          <p:cNvPr id="6" name="Slide Number Placeholder 5"/>
           <p:cNvSpPr>
             <a:spLocks noGrp="1"/>
           </p:cNvSpPr>
@@ -728,7 +644,7 @@
     </p:spTree>
     <p:extLst>
       <p:ext uri="{BB962C8B-B14F-4D97-AF65-F5344CB8AC3E}">
-        <p14:creationId xmlns:p14="http://schemas.microsoft.com/office/powerpoint/2010/main" val="1571620130"/>
+        <p14:creationId xmlns:p14="http://schemas.microsoft.com/office/powerpoint/2010/main" val="3669247661"/>
       </p:ext>
     </p:extLst>
   </p:cSld>
@@ -757,13 +673,7 @@
       </p:grpSpPr>
       <p:sp>
         <p:nvSpPr>
-          <p:cNvPr id="2" name="Title 1">
-            <a:extLst>
-              <a:ext uri="{FF2B5EF4-FFF2-40B4-BE49-F238E27FC236}">
-                <a16:creationId xmlns:a16="http://schemas.microsoft.com/office/drawing/2014/main" id="{CDD16EB4-73F7-EB77-C78C-A8097FE91DE0}"/>
-              </a:ext>
-            </a:extLst>
-          </p:cNvPr>
+          <p:cNvPr id="2" name="Title 1"/>
           <p:cNvSpPr>
             <a:spLocks noGrp="1"/>
           </p:cNvSpPr>
@@ -780,18 +690,13 @@
               <a:rPr lang="en-US"/>
               <a:t>Click to edit Master title style</a:t>
             </a:r>
-          </a:p>
-        </p:txBody>
-      </p:sp>
-      <p:sp>
-        <p:nvSpPr>
-          <p:cNvPr id="3" name="Content Placeholder 2">
-            <a:extLst>
-              <a:ext uri="{FF2B5EF4-FFF2-40B4-BE49-F238E27FC236}">
-                <a16:creationId xmlns:a16="http://schemas.microsoft.com/office/drawing/2014/main" id="{838C4CCB-EB1C-88E9-2628-D40018135965}"/>
-              </a:ext>
-            </a:extLst>
-          </p:cNvPr>
+            <a:endParaRPr lang="en-US" dirty="0"/>
+          </a:p>
+        </p:txBody>
+      </p:sp>
+      <p:sp>
+        <p:nvSpPr>
+          <p:cNvPr id="3" name="Content Placeholder 2"/>
           <p:cNvSpPr>
             <a:spLocks noGrp="1"/>
           </p:cNvSpPr>
@@ -837,18 +742,13 @@
               <a:rPr lang="en-US"/>
               <a:t>Fifth level</a:t>
             </a:r>
-          </a:p>
-        </p:txBody>
-      </p:sp>
-      <p:sp>
-        <p:nvSpPr>
-          <p:cNvPr id="4" name="Date Placeholder 3">
-            <a:extLst>
-              <a:ext uri="{FF2B5EF4-FFF2-40B4-BE49-F238E27FC236}">
-                <a16:creationId xmlns:a16="http://schemas.microsoft.com/office/drawing/2014/main" id="{9505B298-870F-D704-E063-41C7E9729933}"/>
-              </a:ext>
-            </a:extLst>
-          </p:cNvPr>
+            <a:endParaRPr lang="en-US" dirty="0"/>
+          </a:p>
+        </p:txBody>
+      </p:sp>
+      <p:sp>
+        <p:nvSpPr>
+          <p:cNvPr id="4" name="Date Placeholder 3"/>
           <p:cNvSpPr>
             <a:spLocks noGrp="1"/>
           </p:cNvSpPr>
@@ -863,7 +763,7 @@
           <a:p>
             <a:fld id="{69841353-8F51-48F1-AFC3-B4F4C2686E57}" type="datetimeFigureOut">
               <a:rPr lang="en-US" smtClean="0"/>
-              <a:t>12/25/2025</a:t>
+              <a:t>3/7/2026</a:t>
             </a:fld>
             <a:endParaRPr lang="en-US"/>
           </a:p>
@@ -871,13 +771,7 @@
       </p:sp>
       <p:sp>
         <p:nvSpPr>
-          <p:cNvPr id="5" name="Footer Placeholder 4">
-            <a:extLst>
-              <a:ext uri="{FF2B5EF4-FFF2-40B4-BE49-F238E27FC236}">
-                <a16:creationId xmlns:a16="http://schemas.microsoft.com/office/drawing/2014/main" id="{4A188B67-F062-6FFE-999A-8C91C9EEB297}"/>
-              </a:ext>
-            </a:extLst>
-          </p:cNvPr>
+          <p:cNvPr id="5" name="Footer Placeholder 4"/>
           <p:cNvSpPr>
             <a:spLocks noGrp="1"/>
           </p:cNvSpPr>
@@ -896,13 +790,7 @@
       </p:sp>
       <p:sp>
         <p:nvSpPr>
-          <p:cNvPr id="6" name="Slide Number Placeholder 5">
-            <a:extLst>
-              <a:ext uri="{FF2B5EF4-FFF2-40B4-BE49-F238E27FC236}">
-                <a16:creationId xmlns:a16="http://schemas.microsoft.com/office/drawing/2014/main" id="{35E89289-3E04-63C5-3BB8-970C35E4F57A}"/>
-              </a:ext>
-            </a:extLst>
-          </p:cNvPr>
+          <p:cNvPr id="6" name="Slide Number Placeholder 5"/>
           <p:cNvSpPr>
             <a:spLocks noGrp="1"/>
           </p:cNvSpPr>
@@ -926,7 +814,7 @@
     </p:spTree>
     <p:extLst>
       <p:ext uri="{BB962C8B-B14F-4D97-AF65-F5344CB8AC3E}">
-        <p14:creationId xmlns:p14="http://schemas.microsoft.com/office/powerpoint/2010/main" val="1587535817"/>
+        <p14:creationId xmlns:p14="http://schemas.microsoft.com/office/powerpoint/2010/main" val="489701166"/>
       </p:ext>
     </p:extLst>
   </p:cSld>
@@ -955,13 +843,7 @@
       </p:grpSpPr>
       <p:sp>
         <p:nvSpPr>
-          <p:cNvPr id="2" name="Title 1">
-            <a:extLst>
-              <a:ext uri="{FF2B5EF4-FFF2-40B4-BE49-F238E27FC236}">
-                <a16:creationId xmlns:a16="http://schemas.microsoft.com/office/drawing/2014/main" id="{3941BBA7-A21E-1329-4C41-4009E87098D9}"/>
-              </a:ext>
-            </a:extLst>
-          </p:cNvPr>
+          <p:cNvPr id="2" name="Title 1"/>
           <p:cNvSpPr>
             <a:spLocks noGrp="1"/>
           </p:cNvSpPr>
@@ -971,8 +853,8 @@
         </p:nvSpPr>
         <p:spPr>
           <a:xfrm>
-            <a:off x="831850" y="1709738"/>
-            <a:ext cx="10515600" cy="2852737"/>
+            <a:off x="935831" y="1709739"/>
+            <a:ext cx="11830050" cy="2852737"/>
           </a:xfrm>
         </p:spPr>
         <p:txBody>
@@ -987,18 +869,13 @@
               <a:rPr lang="en-US"/>
               <a:t>Click to edit Master title style</a:t>
             </a:r>
-          </a:p>
-        </p:txBody>
-      </p:sp>
-      <p:sp>
-        <p:nvSpPr>
-          <p:cNvPr id="3" name="Text Placeholder 2">
-            <a:extLst>
-              <a:ext uri="{FF2B5EF4-FFF2-40B4-BE49-F238E27FC236}">
-                <a16:creationId xmlns:a16="http://schemas.microsoft.com/office/drawing/2014/main" id="{75B1CE14-977C-F4B2-791D-51CDC11B73AA}"/>
-              </a:ext>
-            </a:extLst>
-          </p:cNvPr>
+            <a:endParaRPr lang="en-US" dirty="0"/>
+          </a:p>
+        </p:txBody>
+      </p:sp>
+      <p:sp>
+        <p:nvSpPr>
+          <p:cNvPr id="3" name="Text Placeholder 2"/>
           <p:cNvSpPr>
             <a:spLocks noGrp="1"/>
           </p:cNvSpPr>
@@ -1008,8 +885,8 @@
         </p:nvSpPr>
         <p:spPr>
           <a:xfrm>
-            <a:off x="831850" y="4589463"/>
-            <a:ext cx="10515600" cy="1500187"/>
+            <a:off x="935831" y="4589464"/>
+            <a:ext cx="11830050" cy="1500187"/>
           </a:xfrm>
         </p:spPr>
         <p:txBody>
@@ -1117,13 +994,7 @@
       </p:sp>
       <p:sp>
         <p:nvSpPr>
-          <p:cNvPr id="4" name="Date Placeholder 3">
-            <a:extLst>
-              <a:ext uri="{FF2B5EF4-FFF2-40B4-BE49-F238E27FC236}">
-                <a16:creationId xmlns:a16="http://schemas.microsoft.com/office/drawing/2014/main" id="{B2477F04-417B-862A-5421-9590B2C935F2}"/>
-              </a:ext>
-            </a:extLst>
-          </p:cNvPr>
+          <p:cNvPr id="4" name="Date Placeholder 3"/>
           <p:cNvSpPr>
             <a:spLocks noGrp="1"/>
           </p:cNvSpPr>
@@ -1138,7 +1009,7 @@
           <a:p>
             <a:fld id="{69841353-8F51-48F1-AFC3-B4F4C2686E57}" type="datetimeFigureOut">
               <a:rPr lang="en-US" smtClean="0"/>
-              <a:t>12/25/2025</a:t>
+              <a:t>3/7/2026</a:t>
             </a:fld>
             <a:endParaRPr lang="en-US"/>
           </a:p>
@@ -1146,13 +1017,7 @@
       </p:sp>
       <p:sp>
         <p:nvSpPr>
-          <p:cNvPr id="5" name="Footer Placeholder 4">
-            <a:extLst>
-              <a:ext uri="{FF2B5EF4-FFF2-40B4-BE49-F238E27FC236}">
-                <a16:creationId xmlns:a16="http://schemas.microsoft.com/office/drawing/2014/main" id="{A9D8D939-A860-A4BC-CA1D-CA7003DC56B2}"/>
-              </a:ext>
-            </a:extLst>
-          </p:cNvPr>
+          <p:cNvPr id="5" name="Footer Placeholder 4"/>
           <p:cNvSpPr>
             <a:spLocks noGrp="1"/>
           </p:cNvSpPr>
@@ -1171,13 +1036,7 @@
       </p:sp>
       <p:sp>
         <p:nvSpPr>
-          <p:cNvPr id="6" name="Slide Number Placeholder 5">
-            <a:extLst>
-              <a:ext uri="{FF2B5EF4-FFF2-40B4-BE49-F238E27FC236}">
-                <a16:creationId xmlns:a16="http://schemas.microsoft.com/office/drawing/2014/main" id="{2FE8B0DC-ED13-310B-B70F-9A768C7B51AE}"/>
-              </a:ext>
-            </a:extLst>
-          </p:cNvPr>
+          <p:cNvPr id="6" name="Slide Number Placeholder 5"/>
           <p:cNvSpPr>
             <a:spLocks noGrp="1"/>
           </p:cNvSpPr>
@@ -1201,7 +1060,7 @@
     </p:spTree>
     <p:extLst>
       <p:ext uri="{BB962C8B-B14F-4D97-AF65-F5344CB8AC3E}">
-        <p14:creationId xmlns:p14="http://schemas.microsoft.com/office/powerpoint/2010/main" val="2719636708"/>
+        <p14:creationId xmlns:p14="http://schemas.microsoft.com/office/powerpoint/2010/main" val="2044210357"/>
       </p:ext>
     </p:extLst>
   </p:cSld>
@@ -1230,13 +1089,7 @@
       </p:grpSpPr>
       <p:sp>
         <p:nvSpPr>
-          <p:cNvPr id="2" name="Title 1">
-            <a:extLst>
-              <a:ext uri="{FF2B5EF4-FFF2-40B4-BE49-F238E27FC236}">
-                <a16:creationId xmlns:a16="http://schemas.microsoft.com/office/drawing/2014/main" id="{5965C8EE-8976-1CFF-2E1A-E401C22D6459}"/>
-              </a:ext>
-            </a:extLst>
-          </p:cNvPr>
+          <p:cNvPr id="2" name="Title 1"/>
           <p:cNvSpPr>
             <a:spLocks noGrp="1"/>
           </p:cNvSpPr>
@@ -1253,18 +1106,13 @@
               <a:rPr lang="en-US"/>
               <a:t>Click to edit Master title style</a:t>
             </a:r>
-          </a:p>
-        </p:txBody>
-      </p:sp>
-      <p:sp>
-        <p:nvSpPr>
-          <p:cNvPr id="3" name="Content Placeholder 2">
-            <a:extLst>
-              <a:ext uri="{FF2B5EF4-FFF2-40B4-BE49-F238E27FC236}">
-                <a16:creationId xmlns:a16="http://schemas.microsoft.com/office/drawing/2014/main" id="{0D587617-2E9C-35FE-76F5-FF3CAF7A56DF}"/>
-              </a:ext>
-            </a:extLst>
-          </p:cNvPr>
+            <a:endParaRPr lang="en-US" dirty="0"/>
+          </a:p>
+        </p:txBody>
+      </p:sp>
+      <p:sp>
+        <p:nvSpPr>
+          <p:cNvPr id="3" name="Content Placeholder 2"/>
           <p:cNvSpPr>
             <a:spLocks noGrp="1"/>
           </p:cNvSpPr>
@@ -1274,8 +1122,8 @@
         </p:nvSpPr>
         <p:spPr>
           <a:xfrm>
-            <a:off x="838200" y="1825625"/>
-            <a:ext cx="5181600" cy="4351338"/>
+            <a:off x="942975" y="1825625"/>
+            <a:ext cx="5829300" cy="4351338"/>
           </a:xfrm>
         </p:spPr>
         <p:txBody>
@@ -1315,18 +1163,13 @@
               <a:rPr lang="en-US"/>
               <a:t>Fifth level</a:t>
             </a:r>
-          </a:p>
-        </p:txBody>
-      </p:sp>
-      <p:sp>
-        <p:nvSpPr>
-          <p:cNvPr id="4" name="Content Placeholder 3">
-            <a:extLst>
-              <a:ext uri="{FF2B5EF4-FFF2-40B4-BE49-F238E27FC236}">
-                <a16:creationId xmlns:a16="http://schemas.microsoft.com/office/drawing/2014/main" id="{05494FE1-F8D2-C8C2-8DAA-592CF5D7B82E}"/>
-              </a:ext>
-            </a:extLst>
-          </p:cNvPr>
+            <a:endParaRPr lang="en-US" dirty="0"/>
+          </a:p>
+        </p:txBody>
+      </p:sp>
+      <p:sp>
+        <p:nvSpPr>
+          <p:cNvPr id="4" name="Content Placeholder 3"/>
           <p:cNvSpPr>
             <a:spLocks noGrp="1"/>
           </p:cNvSpPr>
@@ -1336,8 +1179,8 @@
         </p:nvSpPr>
         <p:spPr>
           <a:xfrm>
-            <a:off x="6172200" y="1825625"/>
-            <a:ext cx="5181600" cy="4351338"/>
+            <a:off x="6943725" y="1825625"/>
+            <a:ext cx="5829300" cy="4351338"/>
           </a:xfrm>
         </p:spPr>
         <p:txBody>
@@ -1377,18 +1220,13 @@
               <a:rPr lang="en-US"/>
               <a:t>Fifth level</a:t>
             </a:r>
-          </a:p>
-        </p:txBody>
-      </p:sp>
-      <p:sp>
-        <p:nvSpPr>
-          <p:cNvPr id="5" name="Date Placeholder 4">
-            <a:extLst>
-              <a:ext uri="{FF2B5EF4-FFF2-40B4-BE49-F238E27FC236}">
-                <a16:creationId xmlns:a16="http://schemas.microsoft.com/office/drawing/2014/main" id="{11C03422-7822-79E8-5BF0-A30BA62C962A}"/>
-              </a:ext>
-            </a:extLst>
-          </p:cNvPr>
+            <a:endParaRPr lang="en-US" dirty="0"/>
+          </a:p>
+        </p:txBody>
+      </p:sp>
+      <p:sp>
+        <p:nvSpPr>
+          <p:cNvPr id="5" name="Date Placeholder 4"/>
           <p:cNvSpPr>
             <a:spLocks noGrp="1"/>
           </p:cNvSpPr>
@@ -1403,7 +1241,7 @@
           <a:p>
             <a:fld id="{69841353-8F51-48F1-AFC3-B4F4C2686E57}" type="datetimeFigureOut">
               <a:rPr lang="en-US" smtClean="0"/>
-              <a:t>12/25/2025</a:t>
+              <a:t>3/7/2026</a:t>
             </a:fld>
             <a:endParaRPr lang="en-US"/>
           </a:p>
@@ -1411,13 +1249,7 @@
       </p:sp>
       <p:sp>
         <p:nvSpPr>
-          <p:cNvPr id="6" name="Footer Placeholder 5">
-            <a:extLst>
-              <a:ext uri="{FF2B5EF4-FFF2-40B4-BE49-F238E27FC236}">
-                <a16:creationId xmlns:a16="http://schemas.microsoft.com/office/drawing/2014/main" id="{15CFB79C-E6B9-F53B-3717-2CCFD28DDF6F}"/>
-              </a:ext>
-            </a:extLst>
-          </p:cNvPr>
+          <p:cNvPr id="6" name="Footer Placeholder 5"/>
           <p:cNvSpPr>
             <a:spLocks noGrp="1"/>
           </p:cNvSpPr>
@@ -1436,13 +1268,7 @@
       </p:sp>
       <p:sp>
         <p:nvSpPr>
-          <p:cNvPr id="7" name="Slide Number Placeholder 6">
-            <a:extLst>
-              <a:ext uri="{FF2B5EF4-FFF2-40B4-BE49-F238E27FC236}">
-                <a16:creationId xmlns:a16="http://schemas.microsoft.com/office/drawing/2014/main" id="{53B196FC-0756-78B8-2FF3-D489D481DE86}"/>
-              </a:ext>
-            </a:extLst>
-          </p:cNvPr>
+          <p:cNvPr id="7" name="Slide Number Placeholder 6"/>
           <p:cNvSpPr>
             <a:spLocks noGrp="1"/>
           </p:cNvSpPr>
@@ -1466,7 +1292,7 @@
     </p:spTree>
     <p:extLst>
       <p:ext uri="{BB962C8B-B14F-4D97-AF65-F5344CB8AC3E}">
-        <p14:creationId xmlns:p14="http://schemas.microsoft.com/office/powerpoint/2010/main" val="1455748773"/>
+        <p14:creationId xmlns:p14="http://schemas.microsoft.com/office/powerpoint/2010/main" val="1975986898"/>
       </p:ext>
     </p:extLst>
   </p:cSld>
@@ -1495,13 +1321,7 @@
       </p:grpSpPr>
       <p:sp>
         <p:nvSpPr>
-          <p:cNvPr id="2" name="Title 1">
-            <a:extLst>
-              <a:ext uri="{FF2B5EF4-FFF2-40B4-BE49-F238E27FC236}">
-                <a16:creationId xmlns:a16="http://schemas.microsoft.com/office/drawing/2014/main" id="{96C75654-5796-0425-C6B5-3A1DDFD0CBE7}"/>
-              </a:ext>
-            </a:extLst>
-          </p:cNvPr>
+          <p:cNvPr id="2" name="Title 1"/>
           <p:cNvSpPr>
             <a:spLocks noGrp="1"/>
           </p:cNvSpPr>
@@ -1511,8 +1331,8 @@
         </p:nvSpPr>
         <p:spPr>
           <a:xfrm>
-            <a:off x="839788" y="365125"/>
-            <a:ext cx="10515600" cy="1325563"/>
+            <a:off x="944762" y="365126"/>
+            <a:ext cx="11830050" cy="1325563"/>
           </a:xfrm>
         </p:spPr>
         <p:txBody>
@@ -1523,18 +1343,13 @@
               <a:rPr lang="en-US"/>
               <a:t>Click to edit Master title style</a:t>
             </a:r>
-          </a:p>
-        </p:txBody>
-      </p:sp>
-      <p:sp>
-        <p:nvSpPr>
-          <p:cNvPr id="3" name="Text Placeholder 2">
-            <a:extLst>
-              <a:ext uri="{FF2B5EF4-FFF2-40B4-BE49-F238E27FC236}">
-                <a16:creationId xmlns:a16="http://schemas.microsoft.com/office/drawing/2014/main" id="{02A78080-1DB8-DFC1-3405-F598C0DC2CC8}"/>
-              </a:ext>
-            </a:extLst>
-          </p:cNvPr>
+            <a:endParaRPr lang="en-US" dirty="0"/>
+          </a:p>
+        </p:txBody>
+      </p:sp>
+      <p:sp>
+        <p:nvSpPr>
+          <p:cNvPr id="3" name="Text Placeholder 2"/>
           <p:cNvSpPr>
             <a:spLocks noGrp="1"/>
           </p:cNvSpPr>
@@ -1544,8 +1359,8 @@
         </p:nvSpPr>
         <p:spPr>
           <a:xfrm>
-            <a:off x="839788" y="1681163"/>
-            <a:ext cx="5157787" cy="823912"/>
+            <a:off x="944762" y="1681163"/>
+            <a:ext cx="5802510" cy="823912"/>
           </a:xfrm>
         </p:spPr>
         <p:txBody>
@@ -1599,13 +1414,7 @@
       </p:sp>
       <p:sp>
         <p:nvSpPr>
-          <p:cNvPr id="4" name="Content Placeholder 3">
-            <a:extLst>
-              <a:ext uri="{FF2B5EF4-FFF2-40B4-BE49-F238E27FC236}">
-                <a16:creationId xmlns:a16="http://schemas.microsoft.com/office/drawing/2014/main" id="{A9F41C37-B9AF-FE58-7D05-23D81022E9A1}"/>
-              </a:ext>
-            </a:extLst>
-          </p:cNvPr>
+          <p:cNvPr id="4" name="Content Placeholder 3"/>
           <p:cNvSpPr>
             <a:spLocks noGrp="1"/>
           </p:cNvSpPr>
@@ -1615,8 +1424,8 @@
         </p:nvSpPr>
         <p:spPr>
           <a:xfrm>
-            <a:off x="839788" y="2505075"/>
-            <a:ext cx="5157787" cy="3684588"/>
+            <a:off x="944762" y="2505075"/>
+            <a:ext cx="5802510" cy="3684588"/>
           </a:xfrm>
         </p:spPr>
         <p:txBody>
@@ -1656,18 +1465,13 @@
               <a:rPr lang="en-US"/>
               <a:t>Fifth level</a:t>
             </a:r>
-          </a:p>
-        </p:txBody>
-      </p:sp>
-      <p:sp>
-        <p:nvSpPr>
-          <p:cNvPr id="5" name="Text Placeholder 4">
-            <a:extLst>
-              <a:ext uri="{FF2B5EF4-FFF2-40B4-BE49-F238E27FC236}">
-                <a16:creationId xmlns:a16="http://schemas.microsoft.com/office/drawing/2014/main" id="{08BB3E40-3447-AE96-C6BA-6A2F7D600C86}"/>
-              </a:ext>
-            </a:extLst>
-          </p:cNvPr>
+            <a:endParaRPr lang="en-US" dirty="0"/>
+          </a:p>
+        </p:txBody>
+      </p:sp>
+      <p:sp>
+        <p:nvSpPr>
+          <p:cNvPr id="5" name="Text Placeholder 4"/>
           <p:cNvSpPr>
             <a:spLocks noGrp="1"/>
           </p:cNvSpPr>
@@ -1677,8 +1481,8 @@
         </p:nvSpPr>
         <p:spPr>
           <a:xfrm>
-            <a:off x="6172200" y="1681163"/>
-            <a:ext cx="5183188" cy="823912"/>
+            <a:off x="6943725" y="1681163"/>
+            <a:ext cx="5831087" cy="823912"/>
           </a:xfrm>
         </p:spPr>
         <p:txBody>
@@ -1732,13 +1536,7 @@
       </p:sp>
       <p:sp>
         <p:nvSpPr>
-          <p:cNvPr id="6" name="Content Placeholder 5">
-            <a:extLst>
-              <a:ext uri="{FF2B5EF4-FFF2-40B4-BE49-F238E27FC236}">
-                <a16:creationId xmlns:a16="http://schemas.microsoft.com/office/drawing/2014/main" id="{23DED48A-9D55-F966-D7F9-D509BFE52674}"/>
-              </a:ext>
-            </a:extLst>
-          </p:cNvPr>
+          <p:cNvPr id="6" name="Content Placeholder 5"/>
           <p:cNvSpPr>
             <a:spLocks noGrp="1"/>
           </p:cNvSpPr>
@@ -1748,8 +1546,8 @@
         </p:nvSpPr>
         <p:spPr>
           <a:xfrm>
-            <a:off x="6172200" y="2505075"/>
-            <a:ext cx="5183188" cy="3684588"/>
+            <a:off x="6943725" y="2505075"/>
+            <a:ext cx="5831087" cy="3684588"/>
           </a:xfrm>
         </p:spPr>
         <p:txBody>
@@ -1789,18 +1587,13 @@
               <a:rPr lang="en-US"/>
               <a:t>Fifth level</a:t>
             </a:r>
-          </a:p>
-        </p:txBody>
-      </p:sp>
-      <p:sp>
-        <p:nvSpPr>
-          <p:cNvPr id="7" name="Date Placeholder 6">
-            <a:extLst>
-              <a:ext uri="{FF2B5EF4-FFF2-40B4-BE49-F238E27FC236}">
-                <a16:creationId xmlns:a16="http://schemas.microsoft.com/office/drawing/2014/main" id="{E6C1DFE9-653D-34E7-78F1-7D069D6850AD}"/>
-              </a:ext>
-            </a:extLst>
-          </p:cNvPr>
+            <a:endParaRPr lang="en-US" dirty="0"/>
+          </a:p>
+        </p:txBody>
+      </p:sp>
+      <p:sp>
+        <p:nvSpPr>
+          <p:cNvPr id="7" name="Date Placeholder 6"/>
           <p:cNvSpPr>
             <a:spLocks noGrp="1"/>
           </p:cNvSpPr>
@@ -1815,7 +1608,7 @@
           <a:p>
             <a:fld id="{69841353-8F51-48F1-AFC3-B4F4C2686E57}" type="datetimeFigureOut">
               <a:rPr lang="en-US" smtClean="0"/>
-              <a:t>12/25/2025</a:t>
+              <a:t>3/7/2026</a:t>
             </a:fld>
             <a:endParaRPr lang="en-US"/>
           </a:p>
@@ -1823,13 +1616,7 @@
       </p:sp>
       <p:sp>
         <p:nvSpPr>
-          <p:cNvPr id="8" name="Footer Placeholder 7">
-            <a:extLst>
-              <a:ext uri="{FF2B5EF4-FFF2-40B4-BE49-F238E27FC236}">
-                <a16:creationId xmlns:a16="http://schemas.microsoft.com/office/drawing/2014/main" id="{C8119913-B7C3-7A6C-3D1F-B7FEECBD7099}"/>
-              </a:ext>
-            </a:extLst>
-          </p:cNvPr>
+          <p:cNvPr id="8" name="Footer Placeholder 7"/>
           <p:cNvSpPr>
             <a:spLocks noGrp="1"/>
           </p:cNvSpPr>
@@ -1848,13 +1635,7 @@
       </p:sp>
       <p:sp>
         <p:nvSpPr>
-          <p:cNvPr id="9" name="Slide Number Placeholder 8">
-            <a:extLst>
-              <a:ext uri="{FF2B5EF4-FFF2-40B4-BE49-F238E27FC236}">
-                <a16:creationId xmlns:a16="http://schemas.microsoft.com/office/drawing/2014/main" id="{6F71007F-D904-7D0B-5044-3090BFAC7BD1}"/>
-              </a:ext>
-            </a:extLst>
-          </p:cNvPr>
+          <p:cNvPr id="9" name="Slide Number Placeholder 8"/>
           <p:cNvSpPr>
             <a:spLocks noGrp="1"/>
           </p:cNvSpPr>
@@ -1878,7 +1659,7 @@
     </p:spTree>
     <p:extLst>
       <p:ext uri="{BB962C8B-B14F-4D97-AF65-F5344CB8AC3E}">
-        <p14:creationId xmlns:p14="http://schemas.microsoft.com/office/powerpoint/2010/main" val="4195212096"/>
+        <p14:creationId xmlns:p14="http://schemas.microsoft.com/office/powerpoint/2010/main" val="1523982078"/>
       </p:ext>
     </p:extLst>
   </p:cSld>
@@ -1907,13 +1688,7 @@
       </p:grpSpPr>
       <p:sp>
         <p:nvSpPr>
-          <p:cNvPr id="2" name="Title 1">
-            <a:extLst>
-              <a:ext uri="{FF2B5EF4-FFF2-40B4-BE49-F238E27FC236}">
-                <a16:creationId xmlns:a16="http://schemas.microsoft.com/office/drawing/2014/main" id="{C9326CBA-B317-FBD3-7704-C1CE218C8C78}"/>
-              </a:ext>
-            </a:extLst>
-          </p:cNvPr>
+          <p:cNvPr id="2" name="Title 1"/>
           <p:cNvSpPr>
             <a:spLocks noGrp="1"/>
           </p:cNvSpPr>
@@ -1930,18 +1705,13 @@
               <a:rPr lang="en-US"/>
               <a:t>Click to edit Master title style</a:t>
             </a:r>
-          </a:p>
-        </p:txBody>
-      </p:sp>
-      <p:sp>
-        <p:nvSpPr>
-          <p:cNvPr id="3" name="Date Placeholder 2">
-            <a:extLst>
-              <a:ext uri="{FF2B5EF4-FFF2-40B4-BE49-F238E27FC236}">
-                <a16:creationId xmlns:a16="http://schemas.microsoft.com/office/drawing/2014/main" id="{87BBF5F6-679B-125C-E85E-D8343679268F}"/>
-              </a:ext>
-            </a:extLst>
-          </p:cNvPr>
+            <a:endParaRPr lang="en-US" dirty="0"/>
+          </a:p>
+        </p:txBody>
+      </p:sp>
+      <p:sp>
+        <p:nvSpPr>
+          <p:cNvPr id="3" name="Date Placeholder 2"/>
           <p:cNvSpPr>
             <a:spLocks noGrp="1"/>
           </p:cNvSpPr>
@@ -1956,7 +1726,7 @@
           <a:p>
             <a:fld id="{69841353-8F51-48F1-AFC3-B4F4C2686E57}" type="datetimeFigureOut">
               <a:rPr lang="en-US" smtClean="0"/>
-              <a:t>12/25/2025</a:t>
+              <a:t>3/7/2026</a:t>
             </a:fld>
             <a:endParaRPr lang="en-US"/>
           </a:p>
@@ -1964,13 +1734,7 @@
       </p:sp>
       <p:sp>
         <p:nvSpPr>
-          <p:cNvPr id="4" name="Footer Placeholder 3">
-            <a:extLst>
-              <a:ext uri="{FF2B5EF4-FFF2-40B4-BE49-F238E27FC236}">
-                <a16:creationId xmlns:a16="http://schemas.microsoft.com/office/drawing/2014/main" id="{D81506D3-2EC3-9717-2FFC-E6E1DA4AA6E6}"/>
-              </a:ext>
-            </a:extLst>
-          </p:cNvPr>
+          <p:cNvPr id="4" name="Footer Placeholder 3"/>
           <p:cNvSpPr>
             <a:spLocks noGrp="1"/>
           </p:cNvSpPr>
@@ -1989,13 +1753,7 @@
       </p:sp>
       <p:sp>
         <p:nvSpPr>
-          <p:cNvPr id="5" name="Slide Number Placeholder 4">
-            <a:extLst>
-              <a:ext uri="{FF2B5EF4-FFF2-40B4-BE49-F238E27FC236}">
-                <a16:creationId xmlns:a16="http://schemas.microsoft.com/office/drawing/2014/main" id="{8032B54E-6592-AA60-F4B1-B7B367EFBF0F}"/>
-              </a:ext>
-            </a:extLst>
-          </p:cNvPr>
+          <p:cNvPr id="5" name="Slide Number Placeholder 4"/>
           <p:cNvSpPr>
             <a:spLocks noGrp="1"/>
           </p:cNvSpPr>
@@ -2019,7 +1777,7 @@
     </p:spTree>
     <p:extLst>
       <p:ext uri="{BB962C8B-B14F-4D97-AF65-F5344CB8AC3E}">
-        <p14:creationId xmlns:p14="http://schemas.microsoft.com/office/powerpoint/2010/main" val="3166006245"/>
+        <p14:creationId xmlns:p14="http://schemas.microsoft.com/office/powerpoint/2010/main" val="3133151551"/>
       </p:ext>
     </p:extLst>
   </p:cSld>
@@ -2048,13 +1806,7 @@
       </p:grpSpPr>
       <p:sp>
         <p:nvSpPr>
-          <p:cNvPr id="2" name="Date Placeholder 1">
-            <a:extLst>
-              <a:ext uri="{FF2B5EF4-FFF2-40B4-BE49-F238E27FC236}">
-                <a16:creationId xmlns:a16="http://schemas.microsoft.com/office/drawing/2014/main" id="{21CDF7C7-A126-BFD8-2D63-1626E50EECBB}"/>
-              </a:ext>
-            </a:extLst>
-          </p:cNvPr>
+          <p:cNvPr id="2" name="Date Placeholder 1"/>
           <p:cNvSpPr>
             <a:spLocks noGrp="1"/>
           </p:cNvSpPr>
@@ -2069,7 +1821,7 @@
           <a:p>
             <a:fld id="{69841353-8F51-48F1-AFC3-B4F4C2686E57}" type="datetimeFigureOut">
               <a:rPr lang="en-US" smtClean="0"/>
-              <a:t>12/25/2025</a:t>
+              <a:t>3/7/2026</a:t>
             </a:fld>
             <a:endParaRPr lang="en-US"/>
           </a:p>
@@ -2077,13 +1829,7 @@
       </p:sp>
       <p:sp>
         <p:nvSpPr>
-          <p:cNvPr id="3" name="Footer Placeholder 2">
-            <a:extLst>
-              <a:ext uri="{FF2B5EF4-FFF2-40B4-BE49-F238E27FC236}">
-                <a16:creationId xmlns:a16="http://schemas.microsoft.com/office/drawing/2014/main" id="{A65CBE8B-E1C6-E93D-8438-11B3ED1ABB0C}"/>
-              </a:ext>
-            </a:extLst>
-          </p:cNvPr>
+          <p:cNvPr id="3" name="Footer Placeholder 2"/>
           <p:cNvSpPr>
             <a:spLocks noGrp="1"/>
           </p:cNvSpPr>
@@ -2102,13 +1848,7 @@
       </p:sp>
       <p:sp>
         <p:nvSpPr>
-          <p:cNvPr id="4" name="Slide Number Placeholder 3">
-            <a:extLst>
-              <a:ext uri="{FF2B5EF4-FFF2-40B4-BE49-F238E27FC236}">
-                <a16:creationId xmlns:a16="http://schemas.microsoft.com/office/drawing/2014/main" id="{AB14B2E6-1233-2C90-4B62-FFA02B021858}"/>
-              </a:ext>
-            </a:extLst>
-          </p:cNvPr>
+          <p:cNvPr id="4" name="Slide Number Placeholder 3"/>
           <p:cNvSpPr>
             <a:spLocks noGrp="1"/>
           </p:cNvSpPr>
@@ -2132,7 +1872,7 @@
     </p:spTree>
     <p:extLst>
       <p:ext uri="{BB962C8B-B14F-4D97-AF65-F5344CB8AC3E}">
-        <p14:creationId xmlns:p14="http://schemas.microsoft.com/office/powerpoint/2010/main" val="3613858705"/>
+        <p14:creationId xmlns:p14="http://schemas.microsoft.com/office/powerpoint/2010/main" val="800859483"/>
       </p:ext>
     </p:extLst>
   </p:cSld>
@@ -2161,13 +1901,7 @@
       </p:grpSpPr>
       <p:sp>
         <p:nvSpPr>
-          <p:cNvPr id="2" name="Title 1">
-            <a:extLst>
-              <a:ext uri="{FF2B5EF4-FFF2-40B4-BE49-F238E27FC236}">
-                <a16:creationId xmlns:a16="http://schemas.microsoft.com/office/drawing/2014/main" id="{CAD2FB7C-1035-070C-FB74-B83584AEF1C0}"/>
-              </a:ext>
-            </a:extLst>
-          </p:cNvPr>
+          <p:cNvPr id="2" name="Title 1"/>
           <p:cNvSpPr>
             <a:spLocks noGrp="1"/>
           </p:cNvSpPr>
@@ -2177,8 +1911,8 @@
         </p:nvSpPr>
         <p:spPr>
           <a:xfrm>
-            <a:off x="839788" y="457200"/>
-            <a:ext cx="3932237" cy="1600200"/>
+            <a:off x="944762" y="457200"/>
+            <a:ext cx="4423767" cy="1600200"/>
           </a:xfrm>
         </p:spPr>
         <p:txBody>
@@ -2193,18 +1927,13 @@
               <a:rPr lang="en-US"/>
               <a:t>Click to edit Master title style</a:t>
             </a:r>
-          </a:p>
-        </p:txBody>
-      </p:sp>
-      <p:sp>
-        <p:nvSpPr>
-          <p:cNvPr id="3" name="Content Placeholder 2">
-            <a:extLst>
-              <a:ext uri="{FF2B5EF4-FFF2-40B4-BE49-F238E27FC236}">
-                <a16:creationId xmlns:a16="http://schemas.microsoft.com/office/drawing/2014/main" id="{238B8393-DCDD-41C6-A81E-6314D9A55D4E}"/>
-              </a:ext>
-            </a:extLst>
-          </p:cNvPr>
+            <a:endParaRPr lang="en-US" dirty="0"/>
+          </a:p>
+        </p:txBody>
+      </p:sp>
+      <p:sp>
+        <p:nvSpPr>
+          <p:cNvPr id="3" name="Content Placeholder 2"/>
           <p:cNvSpPr>
             <a:spLocks noGrp="1"/>
           </p:cNvSpPr>
@@ -2214,8 +1943,8 @@
         </p:nvSpPr>
         <p:spPr>
           <a:xfrm>
-            <a:off x="5183188" y="987425"/>
-            <a:ext cx="6172200" cy="4873625"/>
+            <a:off x="5831087" y="987426"/>
+            <a:ext cx="6943725" cy="4873625"/>
           </a:xfrm>
         </p:spPr>
         <p:txBody>
@@ -2283,18 +2012,13 @@
               <a:rPr lang="en-US"/>
               <a:t>Fifth level</a:t>
             </a:r>
-          </a:p>
-        </p:txBody>
-      </p:sp>
-      <p:sp>
-        <p:nvSpPr>
-          <p:cNvPr id="4" name="Text Placeholder 3">
-            <a:extLst>
-              <a:ext uri="{FF2B5EF4-FFF2-40B4-BE49-F238E27FC236}">
-                <a16:creationId xmlns:a16="http://schemas.microsoft.com/office/drawing/2014/main" id="{98DBDDC6-746B-FF3C-2BC8-BACB08F98004}"/>
-              </a:ext>
-            </a:extLst>
-          </p:cNvPr>
+            <a:endParaRPr lang="en-US" dirty="0"/>
+          </a:p>
+        </p:txBody>
+      </p:sp>
+      <p:sp>
+        <p:nvSpPr>
+          <p:cNvPr id="4" name="Text Placeholder 3"/>
           <p:cNvSpPr>
             <a:spLocks noGrp="1"/>
           </p:cNvSpPr>
@@ -2304,8 +2028,8 @@
         </p:nvSpPr>
         <p:spPr>
           <a:xfrm>
-            <a:off x="839788" y="2057400"/>
-            <a:ext cx="3932237" cy="3811588"/>
+            <a:off x="944762" y="2057400"/>
+            <a:ext cx="4423767" cy="3811588"/>
           </a:xfrm>
         </p:spPr>
         <p:txBody>
@@ -2359,13 +2083,7 @@
       </p:sp>
       <p:sp>
         <p:nvSpPr>
-          <p:cNvPr id="5" name="Date Placeholder 4">
-            <a:extLst>
-              <a:ext uri="{FF2B5EF4-FFF2-40B4-BE49-F238E27FC236}">
-                <a16:creationId xmlns:a16="http://schemas.microsoft.com/office/drawing/2014/main" id="{258C5835-13A1-00C0-7FC0-AF2F0CEC7941}"/>
-              </a:ext>
-            </a:extLst>
-          </p:cNvPr>
+          <p:cNvPr id="5" name="Date Placeholder 4"/>
           <p:cNvSpPr>
             <a:spLocks noGrp="1"/>
           </p:cNvSpPr>
@@ -2380,7 +2098,7 @@
           <a:p>
             <a:fld id="{69841353-8F51-48F1-AFC3-B4F4C2686E57}" type="datetimeFigureOut">
               <a:rPr lang="en-US" smtClean="0"/>
-              <a:t>12/25/2025</a:t>
+              <a:t>3/7/2026</a:t>
             </a:fld>
             <a:endParaRPr lang="en-US"/>
           </a:p>
@@ -2388,13 +2106,7 @@
       </p:sp>
       <p:sp>
         <p:nvSpPr>
-          <p:cNvPr id="6" name="Footer Placeholder 5">
-            <a:extLst>
-              <a:ext uri="{FF2B5EF4-FFF2-40B4-BE49-F238E27FC236}">
-                <a16:creationId xmlns:a16="http://schemas.microsoft.com/office/drawing/2014/main" id="{0503BEA7-DADC-BC03-E0D3-34F70B27DBC5}"/>
-              </a:ext>
-            </a:extLst>
-          </p:cNvPr>
+          <p:cNvPr id="6" name="Footer Placeholder 5"/>
           <p:cNvSpPr>
             <a:spLocks noGrp="1"/>
           </p:cNvSpPr>
@@ -2413,13 +2125,7 @@
       </p:sp>
       <p:sp>
         <p:nvSpPr>
-          <p:cNvPr id="7" name="Slide Number Placeholder 6">
-            <a:extLst>
-              <a:ext uri="{FF2B5EF4-FFF2-40B4-BE49-F238E27FC236}">
-                <a16:creationId xmlns:a16="http://schemas.microsoft.com/office/drawing/2014/main" id="{8C9A35EE-078B-011D-4DEF-9293578648CB}"/>
-              </a:ext>
-            </a:extLst>
-          </p:cNvPr>
+          <p:cNvPr id="7" name="Slide Number Placeholder 6"/>
           <p:cNvSpPr>
             <a:spLocks noGrp="1"/>
           </p:cNvSpPr>
@@ -2443,7 +2149,7 @@
     </p:spTree>
     <p:extLst>
       <p:ext uri="{BB962C8B-B14F-4D97-AF65-F5344CB8AC3E}">
-        <p14:creationId xmlns:p14="http://schemas.microsoft.com/office/powerpoint/2010/main" val="1848386604"/>
+        <p14:creationId xmlns:p14="http://schemas.microsoft.com/office/powerpoint/2010/main" val="378144757"/>
       </p:ext>
     </p:extLst>
   </p:cSld>
@@ -2472,13 +2178,7 @@
       </p:grpSpPr>
       <p:sp>
         <p:nvSpPr>
-          <p:cNvPr id="2" name="Title 1">
-            <a:extLst>
-              <a:ext uri="{FF2B5EF4-FFF2-40B4-BE49-F238E27FC236}">
-                <a16:creationId xmlns:a16="http://schemas.microsoft.com/office/drawing/2014/main" id="{B31A5A13-0B58-A5CD-4306-1902DF2499E0}"/>
-              </a:ext>
-            </a:extLst>
-          </p:cNvPr>
+          <p:cNvPr id="2" name="Title 1"/>
           <p:cNvSpPr>
             <a:spLocks noGrp="1"/>
           </p:cNvSpPr>
@@ -2488,8 +2188,8 @@
         </p:nvSpPr>
         <p:spPr>
           <a:xfrm>
-            <a:off x="839788" y="457200"/>
-            <a:ext cx="3932237" cy="1600200"/>
+            <a:off x="944762" y="457200"/>
+            <a:ext cx="4423767" cy="1600200"/>
           </a:xfrm>
         </p:spPr>
         <p:txBody>
@@ -2504,20 +2204,15 @@
               <a:rPr lang="en-US"/>
               <a:t>Click to edit Master title style</a:t>
             </a:r>
-          </a:p>
-        </p:txBody>
-      </p:sp>
-      <p:sp>
-        <p:nvSpPr>
-          <p:cNvPr id="3" name="Picture Placeholder 2">
-            <a:extLst>
-              <a:ext uri="{FF2B5EF4-FFF2-40B4-BE49-F238E27FC236}">
-                <a16:creationId xmlns:a16="http://schemas.microsoft.com/office/drawing/2014/main" id="{2BE681DA-78BE-FB5D-EA39-568950BB81F6}"/>
-              </a:ext>
-            </a:extLst>
-          </p:cNvPr>
-          <p:cNvSpPr>
-            <a:spLocks noGrp="1"/>
+            <a:endParaRPr lang="en-US" dirty="0"/>
+          </a:p>
+        </p:txBody>
+      </p:sp>
+      <p:sp>
+        <p:nvSpPr>
+          <p:cNvPr id="3" name="Picture Placeholder 2"/>
+          <p:cNvSpPr>
+            <a:spLocks noGrp="1" noChangeAspect="1"/>
           </p:cNvSpPr>
           <p:nvPr>
             <p:ph type="pic" idx="1"/>
@@ -2525,12 +2220,12 @@
         </p:nvSpPr>
         <p:spPr>
           <a:xfrm>
-            <a:off x="5183188" y="987425"/>
-            <a:ext cx="6172200" cy="4873625"/>
+            <a:off x="5831087" y="987426"/>
+            <a:ext cx="6943725" cy="4873625"/>
           </a:xfrm>
         </p:spPr>
         <p:txBody>
-          <a:bodyPr/>
+          <a:bodyPr anchor="t"/>
           <a:lstStyle>
             <a:lvl1pPr marL="0" indent="0">
               <a:buNone/>
@@ -2570,19 +2265,17 @@
             </a:lvl9pPr>
           </a:lstStyle>
           <a:p>
-            <a:endParaRPr lang="en-US"/>
-          </a:p>
-        </p:txBody>
-      </p:sp>
-      <p:sp>
-        <p:nvSpPr>
-          <p:cNvPr id="4" name="Text Placeholder 3">
-            <a:extLst>
-              <a:ext uri="{FF2B5EF4-FFF2-40B4-BE49-F238E27FC236}">
-                <a16:creationId xmlns:a16="http://schemas.microsoft.com/office/drawing/2014/main" id="{F4E2014D-BADB-1F0A-9A1C-E19AB81983C7}"/>
-              </a:ext>
-            </a:extLst>
-          </p:cNvPr>
+            <a:r>
+              <a:rPr lang="en-US"/>
+              <a:t>Click icon to add picture</a:t>
+            </a:r>
+            <a:endParaRPr lang="en-US" dirty="0"/>
+          </a:p>
+        </p:txBody>
+      </p:sp>
+      <p:sp>
+        <p:nvSpPr>
+          <p:cNvPr id="4" name="Text Placeholder 3"/>
           <p:cNvSpPr>
             <a:spLocks noGrp="1"/>
           </p:cNvSpPr>
@@ -2592,8 +2285,8 @@
         </p:nvSpPr>
         <p:spPr>
           <a:xfrm>
-            <a:off x="839788" y="2057400"/>
-            <a:ext cx="3932237" cy="3811588"/>
+            <a:off x="944762" y="2057400"/>
+            <a:ext cx="4423767" cy="3811588"/>
           </a:xfrm>
         </p:spPr>
         <p:txBody>
@@ -2647,13 +2340,7 @@
       </p:sp>
       <p:sp>
         <p:nvSpPr>
-          <p:cNvPr id="5" name="Date Placeholder 4">
-            <a:extLst>
-              <a:ext uri="{FF2B5EF4-FFF2-40B4-BE49-F238E27FC236}">
-                <a16:creationId xmlns:a16="http://schemas.microsoft.com/office/drawing/2014/main" id="{9B3EB645-B482-9021-857F-EF98E726EBE5}"/>
-              </a:ext>
-            </a:extLst>
-          </p:cNvPr>
+          <p:cNvPr id="5" name="Date Placeholder 4"/>
           <p:cNvSpPr>
             <a:spLocks noGrp="1"/>
           </p:cNvSpPr>
@@ -2668,7 +2355,7 @@
           <a:p>
             <a:fld id="{69841353-8F51-48F1-AFC3-B4F4C2686E57}" type="datetimeFigureOut">
               <a:rPr lang="en-US" smtClean="0"/>
-              <a:t>12/25/2025</a:t>
+              <a:t>3/7/2026</a:t>
             </a:fld>
             <a:endParaRPr lang="en-US"/>
           </a:p>
@@ -2676,13 +2363,7 @@
       </p:sp>
       <p:sp>
         <p:nvSpPr>
-          <p:cNvPr id="6" name="Footer Placeholder 5">
-            <a:extLst>
-              <a:ext uri="{FF2B5EF4-FFF2-40B4-BE49-F238E27FC236}">
-                <a16:creationId xmlns:a16="http://schemas.microsoft.com/office/drawing/2014/main" id="{229F7FC2-257E-B78A-A748-7387318F8DD2}"/>
-              </a:ext>
-            </a:extLst>
-          </p:cNvPr>
+          <p:cNvPr id="6" name="Footer Placeholder 5"/>
           <p:cNvSpPr>
             <a:spLocks noGrp="1"/>
           </p:cNvSpPr>
@@ -2701,13 +2382,7 @@
       </p:sp>
       <p:sp>
         <p:nvSpPr>
-          <p:cNvPr id="7" name="Slide Number Placeholder 6">
-            <a:extLst>
-              <a:ext uri="{FF2B5EF4-FFF2-40B4-BE49-F238E27FC236}">
-                <a16:creationId xmlns:a16="http://schemas.microsoft.com/office/drawing/2014/main" id="{E88B9E27-FA9E-8F0B-88F8-FE7584B3997B}"/>
-              </a:ext>
-            </a:extLst>
-          </p:cNvPr>
+          <p:cNvPr id="7" name="Slide Number Placeholder 6"/>
           <p:cNvSpPr>
             <a:spLocks noGrp="1"/>
           </p:cNvSpPr>
@@ -2731,7 +2406,7 @@
     </p:spTree>
     <p:extLst>
       <p:ext uri="{BB962C8B-B14F-4D97-AF65-F5344CB8AC3E}">
-        <p14:creationId xmlns:p14="http://schemas.microsoft.com/office/powerpoint/2010/main" val="2835411318"/>
+        <p14:creationId xmlns:p14="http://schemas.microsoft.com/office/powerpoint/2010/main" val="1744311123"/>
       </p:ext>
     </p:extLst>
   </p:cSld>
@@ -2765,13 +2440,7 @@
       </p:grpSpPr>
       <p:sp>
         <p:nvSpPr>
-          <p:cNvPr id="2" name="Title Placeholder 1">
-            <a:extLst>
-              <a:ext uri="{FF2B5EF4-FFF2-40B4-BE49-F238E27FC236}">
-                <a16:creationId xmlns:a16="http://schemas.microsoft.com/office/drawing/2014/main" id="{B99CB8DC-85DA-779F-D19C-A317F82C2B65}"/>
-              </a:ext>
-            </a:extLst>
-          </p:cNvPr>
+          <p:cNvPr id="2" name="Title Placeholder 1"/>
           <p:cNvSpPr>
             <a:spLocks noGrp="1"/>
           </p:cNvSpPr>
@@ -2781,8 +2450,8 @@
         </p:nvSpPr>
         <p:spPr>
           <a:xfrm>
-            <a:off x="838200" y="365125"/>
-            <a:ext cx="10515600" cy="1325563"/>
+            <a:off x="942975" y="365126"/>
+            <a:ext cx="11830050" cy="1325563"/>
           </a:xfrm>
           <a:prstGeom prst="rect">
             <a:avLst/>
@@ -2798,18 +2467,13 @@
               <a:rPr lang="en-US"/>
               <a:t>Click to edit Master title style</a:t>
             </a:r>
-          </a:p>
-        </p:txBody>
-      </p:sp>
-      <p:sp>
-        <p:nvSpPr>
-          <p:cNvPr id="3" name="Text Placeholder 2">
-            <a:extLst>
-              <a:ext uri="{FF2B5EF4-FFF2-40B4-BE49-F238E27FC236}">
-                <a16:creationId xmlns:a16="http://schemas.microsoft.com/office/drawing/2014/main" id="{95353DF1-EB11-CD22-120D-177281EC1637}"/>
-              </a:ext>
-            </a:extLst>
-          </p:cNvPr>
+            <a:endParaRPr lang="en-US" dirty="0"/>
+          </a:p>
+        </p:txBody>
+      </p:sp>
+      <p:sp>
+        <p:nvSpPr>
+          <p:cNvPr id="3" name="Text Placeholder 2"/>
           <p:cNvSpPr>
             <a:spLocks noGrp="1"/>
           </p:cNvSpPr>
@@ -2819,8 +2483,8 @@
         </p:nvSpPr>
         <p:spPr>
           <a:xfrm>
-            <a:off x="838200" y="1825625"/>
-            <a:ext cx="10515600" cy="4351338"/>
+            <a:off x="942975" y="1825625"/>
+            <a:ext cx="11830050" cy="4351338"/>
           </a:xfrm>
           <a:prstGeom prst="rect">
             <a:avLst/>
@@ -2865,18 +2529,13 @@
               <a:rPr lang="en-US"/>
               <a:t>Fifth level</a:t>
             </a:r>
-          </a:p>
-        </p:txBody>
-      </p:sp>
-      <p:sp>
-        <p:nvSpPr>
-          <p:cNvPr id="4" name="Date Placeholder 3">
-            <a:extLst>
-              <a:ext uri="{FF2B5EF4-FFF2-40B4-BE49-F238E27FC236}">
-                <a16:creationId xmlns:a16="http://schemas.microsoft.com/office/drawing/2014/main" id="{BBB026A3-7206-1275-8CD4-635672E91A0C}"/>
-              </a:ext>
-            </a:extLst>
-          </p:cNvPr>
+            <a:endParaRPr lang="en-US" dirty="0"/>
+          </a:p>
+        </p:txBody>
+      </p:sp>
+      <p:sp>
+        <p:nvSpPr>
+          <p:cNvPr id="4" name="Date Placeholder 3"/>
           <p:cNvSpPr>
             <a:spLocks noGrp="1"/>
           </p:cNvSpPr>
@@ -2886,8 +2545,8 @@
         </p:nvSpPr>
         <p:spPr>
           <a:xfrm>
-            <a:off x="838200" y="6356350"/>
-            <a:ext cx="2743200" cy="365125"/>
+            <a:off x="942975" y="6356351"/>
+            <a:ext cx="3086100" cy="365125"/>
           </a:xfrm>
           <a:prstGeom prst="rect">
             <a:avLst/>
@@ -2909,7 +2568,7 @@
           <a:p>
             <a:fld id="{69841353-8F51-48F1-AFC3-B4F4C2686E57}" type="datetimeFigureOut">
               <a:rPr lang="en-US" smtClean="0"/>
-              <a:t>12/25/2025</a:t>
+              <a:t>3/7/2026</a:t>
             </a:fld>
             <a:endParaRPr lang="en-US"/>
           </a:p>
@@ -2917,13 +2576,7 @@
       </p:sp>
       <p:sp>
         <p:nvSpPr>
-          <p:cNvPr id="5" name="Footer Placeholder 4">
-            <a:extLst>
-              <a:ext uri="{FF2B5EF4-FFF2-40B4-BE49-F238E27FC236}">
-                <a16:creationId xmlns:a16="http://schemas.microsoft.com/office/drawing/2014/main" id="{DDF27D59-0485-BAE1-06AC-948CE82B6AAF}"/>
-              </a:ext>
-            </a:extLst>
-          </p:cNvPr>
+          <p:cNvPr id="5" name="Footer Placeholder 4"/>
           <p:cNvSpPr>
             <a:spLocks noGrp="1"/>
           </p:cNvSpPr>
@@ -2933,8 +2586,8 @@
         </p:nvSpPr>
         <p:spPr>
           <a:xfrm>
-            <a:off x="4038600" y="6356350"/>
-            <a:ext cx="4114800" cy="365125"/>
+            <a:off x="4543425" y="6356351"/>
+            <a:ext cx="4629150" cy="365125"/>
           </a:xfrm>
           <a:prstGeom prst="rect">
             <a:avLst/>
@@ -2960,13 +2613,7 @@
       </p:sp>
       <p:sp>
         <p:nvSpPr>
-          <p:cNvPr id="6" name="Slide Number Placeholder 5">
-            <a:extLst>
-              <a:ext uri="{FF2B5EF4-FFF2-40B4-BE49-F238E27FC236}">
-                <a16:creationId xmlns:a16="http://schemas.microsoft.com/office/drawing/2014/main" id="{469B6740-D0F6-9D48-CA9B-83FA716DC3BF}"/>
-              </a:ext>
-            </a:extLst>
-          </p:cNvPr>
+          <p:cNvPr id="6" name="Slide Number Placeholder 5"/>
           <p:cNvSpPr>
             <a:spLocks noGrp="1"/>
           </p:cNvSpPr>
@@ -2976,8 +2623,8 @@
         </p:nvSpPr>
         <p:spPr>
           <a:xfrm>
-            <a:off x="8610600" y="6356350"/>
-            <a:ext cx="2743200" cy="365125"/>
+            <a:off x="9686925" y="6356351"/>
+            <a:ext cx="3086100" cy="365125"/>
           </a:xfrm>
           <a:prstGeom prst="rect">
             <a:avLst/>
@@ -3008,23 +2655,23 @@
     </p:spTree>
     <p:extLst>
       <p:ext uri="{BB962C8B-B14F-4D97-AF65-F5344CB8AC3E}">
-        <p14:creationId xmlns:p14="http://schemas.microsoft.com/office/powerpoint/2010/main" val="4065018089"/>
+        <p14:creationId xmlns:p14="http://schemas.microsoft.com/office/powerpoint/2010/main" val="3426668916"/>
       </p:ext>
     </p:extLst>
   </p:cSld>
   <p:clrMap bg1="lt1" tx1="dk1" bg2="lt2" tx2="dk2" accent1="accent1" accent2="accent2" accent3="accent3" accent4="accent4" accent5="accent5" accent6="accent6" hlink="hlink" folHlink="folHlink"/>
   <p:sldLayoutIdLst>
-    <p:sldLayoutId id="2147483649" r:id="rId1"/>
-    <p:sldLayoutId id="2147483650" r:id="rId2"/>
-    <p:sldLayoutId id="2147483651" r:id="rId3"/>
-    <p:sldLayoutId id="2147483652" r:id="rId4"/>
-    <p:sldLayoutId id="2147483653" r:id="rId5"/>
-    <p:sldLayoutId id="2147483654" r:id="rId6"/>
-    <p:sldLayoutId id="2147483655" r:id="rId7"/>
-    <p:sldLayoutId id="2147483656" r:id="rId8"/>
-    <p:sldLayoutId id="2147483657" r:id="rId9"/>
-    <p:sldLayoutId id="2147483658" r:id="rId10"/>
-    <p:sldLayoutId id="2147483659" r:id="rId11"/>
+    <p:sldLayoutId id="2147483661" r:id="rId1"/>
+    <p:sldLayoutId id="2147483662" r:id="rId2"/>
+    <p:sldLayoutId id="2147483663" r:id="rId3"/>
+    <p:sldLayoutId id="2147483664" r:id="rId4"/>
+    <p:sldLayoutId id="2147483665" r:id="rId5"/>
+    <p:sldLayoutId id="2147483666" r:id="rId6"/>
+    <p:sldLayoutId id="2147483667" r:id="rId7"/>
+    <p:sldLayoutId id="2147483668" r:id="rId8"/>
+    <p:sldLayoutId id="2147483669" r:id="rId9"/>
+    <p:sldLayoutId id="2147483670" r:id="rId10"/>
+    <p:sldLayoutId id="2147483671" r:id="rId11"/>
   </p:sldLayoutIdLst>
   <p:txStyles>
     <p:titleStyle>
@@ -3354,7 +3001,7 @@
         </p:blipFill>
         <p:spPr>
           <a:xfrm>
-            <a:off x="2689550" y="2580262"/>
+            <a:off x="10943317" y="2513819"/>
             <a:ext cx="1609130" cy="914400"/>
           </a:xfrm>
           <a:prstGeom prst="rect">
@@ -3390,7 +3037,7 @@
         </p:blipFill>
         <p:spPr>
           <a:xfrm>
-            <a:off x="919123" y="880355"/>
+            <a:off x="542987" y="880355"/>
             <a:ext cx="4964374" cy="914400"/>
           </a:xfrm>
           <a:prstGeom prst="rect">
@@ -3426,7 +3073,7 @@
         </p:blipFill>
         <p:spPr>
           <a:xfrm>
-            <a:off x="4701528" y="2580262"/>
+            <a:off x="3351035" y="2514600"/>
             <a:ext cx="2163209" cy="914400"/>
           </a:xfrm>
           <a:prstGeom prst="rect">
@@ -3462,7 +3109,7 @@
         </p:blipFill>
         <p:spPr>
           <a:xfrm>
-            <a:off x="818836" y="2260222"/>
+            <a:off x="11180847" y="651755"/>
             <a:ext cx="1371600" cy="1371600"/>
           </a:xfrm>
           <a:prstGeom prst="rect">
@@ -3498,7 +3145,7 @@
         </p:blipFill>
         <p:spPr>
           <a:xfrm>
-            <a:off x="7219453" y="2580262"/>
+            <a:off x="5938366" y="2514600"/>
             <a:ext cx="2607358" cy="914400"/>
           </a:xfrm>
           <a:prstGeom prst="rect">
@@ -3534,7 +3181,7 @@
         </p:blipFill>
         <p:spPr>
           <a:xfrm>
-            <a:off x="6308505" y="788915"/>
+            <a:off x="5700858" y="788915"/>
             <a:ext cx="5286492" cy="1097280"/>
           </a:xfrm>
           <a:prstGeom prst="rect">
@@ -3564,8 +3211,44 @@
         </p:blipFill>
         <p:spPr>
           <a:xfrm>
-            <a:off x="10181527" y="2168782"/>
+            <a:off x="8969846" y="2193779"/>
             <a:ext cx="1549349" cy="1554480"/>
+          </a:xfrm>
+          <a:prstGeom prst="rect">
+            <a:avLst/>
+          </a:prstGeom>
+        </p:spPr>
+      </p:pic>
+      <p:pic>
+        <p:nvPicPr>
+          <p:cNvPr id="4" name="Picture 3">
+            <a:extLst>
+              <a:ext uri="{FF2B5EF4-FFF2-40B4-BE49-F238E27FC236}">
+                <a16:creationId xmlns:a16="http://schemas.microsoft.com/office/drawing/2014/main" id="{A5DD88F2-591B-FD18-987A-F62EA1624004}"/>
+              </a:ext>
+            </a:extLst>
+          </p:cNvPr>
+          <p:cNvPicPr>
+            <a:picLocks noChangeAspect="1"/>
+          </p:cNvPicPr>
+          <p:nvPr/>
+        </p:nvPicPr>
+        <p:blipFill>
+          <a:blip r:embed="rId9">
+            <a:extLst>
+              <a:ext uri="{28A0092B-C50C-407E-A947-70E740481C1C}">
+                <a14:useLocalDpi xmlns:a14="http://schemas.microsoft.com/office/drawing/2010/main" val="0"/>
+              </a:ext>
+            </a:extLst>
+          </a:blip>
+          <a:stretch>
+            <a:fillRect/>
+          </a:stretch>
+        </p:blipFill>
+        <p:spPr>
+          <a:xfrm>
+            <a:off x="583415" y="2422379"/>
+            <a:ext cx="2343498" cy="1097280"/>
           </a:xfrm>
           <a:prstGeom prst="rect">
             <a:avLst/>
@@ -3588,7 +3271,7 @@
 <file path=ppt/theme/theme1.xml><?xml version="1.0" encoding="utf-8"?>
 <a:theme xmlns:a="http://schemas.openxmlformats.org/drawingml/2006/main" name="Office Theme">
   <a:themeElements>
-    <a:clrScheme name="Office">
+    <a:clrScheme name="Office Theme">
       <a:dk1>
         <a:sysClr val="windowText" lastClr="000000"/>
       </a:dk1>
@@ -3626,7 +3309,7 @@
         <a:srgbClr val="96607D"/>
       </a:folHlink>
     </a:clrScheme>
-    <a:fontScheme name="Office">
+    <a:fontScheme name="Office Theme">
       <a:majorFont>
         <a:latin typeface="Aptos Display" panose="02110004020202020204"/>
         <a:ea typeface=""/>
@@ -3732,7 +3415,7 @@
         <a:font script="Tfng" typeface="Ebrima"/>
       </a:minorFont>
     </a:fontScheme>
-    <a:fmtScheme name="Office">
+    <a:fmtScheme name="Office Theme">
       <a:fillStyleLst>
         <a:solidFill>
           <a:schemeClr val="phClr"/>
